--- a/Emotion detection results.pptx
+++ b/Emotion detection results.pptx
@@ -3529,7 +3529,7 @@
           <a:p>
             <a:fld id="{5FDE9194-0F60-4F85-9920-102CF88B2AD7}" type="datetimeFigureOut">
               <a:rPr lang="en-GB" smtClean="0"/>
-              <a:t>18/12/2024</a:t>
+              <a:t>26/12/2024</a:t>
             </a:fld>
             <a:endParaRPr lang="en-GB"/>
           </a:p>
@@ -3729,7 +3729,7 @@
           <a:p>
             <a:fld id="{5FDE9194-0F60-4F85-9920-102CF88B2AD7}" type="datetimeFigureOut">
               <a:rPr lang="en-GB" smtClean="0"/>
-              <a:t>18/12/2024</a:t>
+              <a:t>26/12/2024</a:t>
             </a:fld>
             <a:endParaRPr lang="en-GB"/>
           </a:p>
@@ -3939,7 +3939,7 @@
           <a:p>
             <a:fld id="{5FDE9194-0F60-4F85-9920-102CF88B2AD7}" type="datetimeFigureOut">
               <a:rPr lang="en-GB" smtClean="0"/>
-              <a:t>18/12/2024</a:t>
+              <a:t>26/12/2024</a:t>
             </a:fld>
             <a:endParaRPr lang="en-GB"/>
           </a:p>
@@ -4139,7 +4139,7 @@
           <a:p>
             <a:fld id="{5FDE9194-0F60-4F85-9920-102CF88B2AD7}" type="datetimeFigureOut">
               <a:rPr lang="en-GB" smtClean="0"/>
-              <a:t>18/12/2024</a:t>
+              <a:t>26/12/2024</a:t>
             </a:fld>
             <a:endParaRPr lang="en-GB"/>
           </a:p>
@@ -4415,7 +4415,7 @@
           <a:p>
             <a:fld id="{5FDE9194-0F60-4F85-9920-102CF88B2AD7}" type="datetimeFigureOut">
               <a:rPr lang="en-GB" smtClean="0"/>
-              <a:t>18/12/2024</a:t>
+              <a:t>26/12/2024</a:t>
             </a:fld>
             <a:endParaRPr lang="en-GB"/>
           </a:p>
@@ -4683,7 +4683,7 @@
           <a:p>
             <a:fld id="{5FDE9194-0F60-4F85-9920-102CF88B2AD7}" type="datetimeFigureOut">
               <a:rPr lang="en-GB" smtClean="0"/>
-              <a:t>18/12/2024</a:t>
+              <a:t>26/12/2024</a:t>
             </a:fld>
             <a:endParaRPr lang="en-GB"/>
           </a:p>
@@ -5098,7 +5098,7 @@
           <a:p>
             <a:fld id="{5FDE9194-0F60-4F85-9920-102CF88B2AD7}" type="datetimeFigureOut">
               <a:rPr lang="en-GB" smtClean="0"/>
-              <a:t>18/12/2024</a:t>
+              <a:t>26/12/2024</a:t>
             </a:fld>
             <a:endParaRPr lang="en-GB"/>
           </a:p>
@@ -5240,7 +5240,7 @@
           <a:p>
             <a:fld id="{5FDE9194-0F60-4F85-9920-102CF88B2AD7}" type="datetimeFigureOut">
               <a:rPr lang="en-GB" smtClean="0"/>
-              <a:t>18/12/2024</a:t>
+              <a:t>26/12/2024</a:t>
             </a:fld>
             <a:endParaRPr lang="en-GB"/>
           </a:p>
@@ -5353,7 +5353,7 @@
           <a:p>
             <a:fld id="{5FDE9194-0F60-4F85-9920-102CF88B2AD7}" type="datetimeFigureOut">
               <a:rPr lang="en-GB" smtClean="0"/>
-              <a:t>18/12/2024</a:t>
+              <a:t>26/12/2024</a:t>
             </a:fld>
             <a:endParaRPr lang="en-GB"/>
           </a:p>
@@ -5666,7 +5666,7 @@
           <a:p>
             <a:fld id="{5FDE9194-0F60-4F85-9920-102CF88B2AD7}" type="datetimeFigureOut">
               <a:rPr lang="en-GB" smtClean="0"/>
-              <a:t>18/12/2024</a:t>
+              <a:t>26/12/2024</a:t>
             </a:fld>
             <a:endParaRPr lang="en-GB"/>
           </a:p>
@@ -5955,7 +5955,7 @@
           <a:p>
             <a:fld id="{5FDE9194-0F60-4F85-9920-102CF88B2AD7}" type="datetimeFigureOut">
               <a:rPr lang="en-GB" smtClean="0"/>
-              <a:t>18/12/2024</a:t>
+              <a:t>26/12/2024</a:t>
             </a:fld>
             <a:endParaRPr lang="en-GB"/>
           </a:p>
@@ -6198,7 +6198,7 @@
           <a:p>
             <a:fld id="{5FDE9194-0F60-4F85-9920-102CF88B2AD7}" type="datetimeFigureOut">
               <a:rPr lang="en-GB" smtClean="0"/>
-              <a:t>18/12/2024</a:t>
+              <a:t>26/12/2024</a:t>
             </a:fld>
             <a:endParaRPr lang="en-GB"/>
           </a:p>
@@ -7623,7 +7623,7 @@
             <p:ph idx="1"/>
             <p:extLst>
               <p:ext uri="{D42A27DB-BD31-4B8C-83A1-F6EECF244321}">
-                <p14:modId xmlns:p14="http://schemas.microsoft.com/office/powerpoint/2010/main" val="680178304"/>
+                <p14:modId xmlns:p14="http://schemas.microsoft.com/office/powerpoint/2010/main" val="2016923969"/>
               </p:ext>
             </p:extLst>
           </p:nvPr>
@@ -8137,7 +8137,10 @@
                     <a:bodyPr/>
                     <a:lstStyle/>
                     <a:p>
-                      <a:endParaRPr lang="en-GB" dirty="0"/>
+                      <a:r>
+                        <a:rPr lang="en-GB" dirty="0"/>
+                        <a:t>4563</a:t>
+                      </a:r>
                     </a:p>
                   </a:txBody>
                   <a:tcPr/>
@@ -8147,7 +8150,10 @@
                     <a:bodyPr/>
                     <a:lstStyle/>
                     <a:p>
-                      <a:endParaRPr lang="en-GB" dirty="0"/>
+                      <a:r>
+                        <a:rPr lang="en-GB" dirty="0"/>
+                        <a:t>0.2354</a:t>
+                      </a:r>
                     </a:p>
                   </a:txBody>
                   <a:tcPr/>
@@ -8157,7 +8163,10 @@
                     <a:bodyPr/>
                     <a:lstStyle/>
                     <a:p>
-                      <a:endParaRPr lang="en-GB" dirty="0"/>
+                      <a:r>
+                        <a:rPr lang="en-GB" dirty="0"/>
+                        <a:t>0.1734</a:t>
+                      </a:r>
                     </a:p>
                   </a:txBody>
                   <a:tcPr/>
